--- a/skill-forks/learndeck-ja/example/deck-editable.pptx
+++ b/skill-forks/learndeck-ja/example/deck-editable.pptx
@@ -1379,7 +1379,7 @@
               <a:buNone/>
             </a:pPr>
             <a:r>
-              <a:rPr lang="en-US" sz="8100" spc="-450" kern="0" dirty="0">
+              <a:rPr lang="en-US" sz="8100" spc="750" kern="0" dirty="0">
                 <a:solidFill>
                   <a:srgbClr val="211F1B"/>
                 </a:solidFill>
@@ -1396,7 +1396,7 @@
               <a:buNone/>
             </a:pPr>
             <a:r>
-              <a:rPr lang="en-US" sz="8100" spc="-450" kern="0" dirty="0">
+              <a:rPr lang="en-US" sz="8100" spc="750" kern="0" dirty="0">
                 <a:solidFill>
                   <a:srgbClr val="211F1B"/>
                 </a:solidFill>
@@ -1414,7 +1414,7 @@
               <a:buNone/>
             </a:pPr>
             <a:r>
-              <a:rPr lang="en-US" sz="8100" spc="-450" kern="0" dirty="0">
+              <a:rPr lang="en-US" sz="8100" spc="750" kern="0" dirty="0">
                 <a:solidFill>
                   <a:srgbClr val="211F1B"/>
                 </a:solidFill>
@@ -1924,7 +1924,7 @@
         </p:nvSpPr>
         <p:spPr>
           <a:xfrm>
-            <a:off x="6115050" y="4076700"/>
+            <a:off x="6115050" y="4533900"/>
             <a:ext cx="5429250" cy="1071563"/>
           </a:xfrm>
           <a:prstGeom prst="rect">
@@ -2088,7 +2088,7 @@
     <p:bg>
       <p:bgPr>
         <a:solidFill>
-          <a:srgbClr val="D84228"/>
+          <a:srgbClr val="C03A24"/>
         </a:solidFill>
       </p:bgPr>
     </p:bg>
@@ -2121,7 +2121,7 @@
             <a:avLst/>
           </a:prstGeom>
           <a:solidFill>
-            <a:srgbClr val="D84228"/>
+            <a:srgbClr val="C03A24"/>
           </a:solidFill>
           <a:ln w="12700">
             <a:solidFill>
